--- a/docs/informativa/outputs/2026-06-17/deck_informativa_2026-06-17.pptx
+++ b/docs/informativa/outputs/2026-06-17/deck_informativa_2026-06-17.pptx
@@ -4524,7 +4524,7 @@
         <p:spPr>
           <a:xfrm>
             <a:off x="365760" y="548640"/>
-            <a:ext cx="11457432" cy="7395897"/>
+            <a:ext cx="11457432" cy="7756086"/>
           </a:xfrm>
           <a:prstGeom prst="rect">
             <a:avLst/>

--- a/docs/informativa/outputs/2026-06-17/deck_informativa_2026-06-17.pptx
+++ b/docs/informativa/outputs/2026-06-17/deck_informativa_2026-06-17.pptx
@@ -3434,8 +3434,8 @@
         </p:nvSpPr>
         <p:spPr>
           <a:xfrm>
-            <a:off x="365760" y="109728"/>
-            <a:ext cx="11457432" cy="365760"/>
+            <a:off x="365760" y="91440"/>
+            <a:ext cx="11457432" cy="329184"/>
           </a:xfrm>
           <a:prstGeom prst="rect">
             <a:avLst/>
@@ -3450,7 +3450,7 @@
           <a:p>
             <a:pPr algn="l"/>
             <a:r>
-              <a:rPr sz="1400" b="1" i="0">
+              <a:rPr sz="1300" b="1" i="0">
                 <a:solidFill>
                   <a:srgbClr val="1A3A5C"/>
                 </a:solidFill>
@@ -3460,9 +3460,49 @@
           </a:p>
         </p:txBody>
       </p:sp>
+      <p:sp>
+        <p:nvSpPr>
+          <p:cNvPr id="3" name="TextBox 2"/>
+          <p:cNvSpPr txBox="1"/>
+          <p:nvPr/>
+        </p:nvSpPr>
+        <p:spPr>
+          <a:xfrm>
+            <a:off x="365760" y="457200"/>
+            <a:ext cx="11457432" cy="1005840"/>
+          </a:xfrm>
+          <a:prstGeom prst="rect">
+            <a:avLst/>
+          </a:prstGeom>
+          <a:solidFill>
+            <a:srgbClr val="FFF5E6"/>
+          </a:solidFill>
+          <a:ln w="15240">
+            <a:solidFill>
+              <a:srgbClr val="B32A2A"/>
+            </a:solidFill>
+          </a:ln>
+        </p:spPr>
+        <p:txBody>
+          <a:bodyPr wrap="square">
+            <a:spAutoFit/>
+          </a:bodyPr>
+          <a:lstStyle/>
+          <a:p>
+            <a:r>
+              <a:rPr sz="1100">
+                <a:solidFill>
+                  <a:srgbClr val="1A3A5C"/>
+                </a:solidFill>
+              </a:rPr>
+              <a:t>Un emisor calificado A en Panamá paga aproximadamente 2.70 puntos porcentuales más que uno calificado AAA, sobre el bono del Tesoro USA del mismo plazo. el plazo más caro para emisores A es '3 a 5 años', donde pagan 4.40 puntos sobre el Tesoro USA. el sector Industriales paga 2.93 puntos porcentuales más que Financiero al mismo nivel de calificación.</a:t>
+            </a:r>
+          </a:p>
+        </p:txBody>
+      </p:sp>
       <p:pic>
         <p:nvPicPr>
-          <p:cNvPr id="3" name="Picture 2" descr="L_PA_1_corp_sector_plazo.png"/>
+          <p:cNvPr id="4" name="Picture 3" descr="L_PA_1_corp_sector_plazo.png"/>
           <p:cNvPicPr>
             <a:picLocks noChangeAspect="1"/>
           </p:cNvPicPr>
@@ -3476,8 +3516,8 @@
         </p:blipFill>
         <p:spPr>
           <a:xfrm>
-            <a:off x="365760" y="548640"/>
-            <a:ext cx="11457432" cy="7078864"/>
+            <a:off x="365760" y="1554480"/>
+            <a:ext cx="11457432" cy="4892040"/>
           </a:xfrm>
           <a:prstGeom prst="rect">
             <a:avLst/>
@@ -3486,14 +3526,14 @@
       </p:pic>
       <p:sp>
         <p:nvSpPr>
-          <p:cNvPr id="4" name="TextBox 3"/>
+          <p:cNvPr id="5" name="TextBox 4"/>
           <p:cNvSpPr txBox="1"/>
           <p:nvPr/>
         </p:nvSpPr>
         <p:spPr>
           <a:xfrm>
-            <a:off x="365760" y="6537960"/>
-            <a:ext cx="11457432" cy="274320"/>
+            <a:off x="365760" y="6565392"/>
+            <a:ext cx="11457432" cy="256032"/>
           </a:xfrm>
           <a:prstGeom prst="rect">
             <a:avLst/>
@@ -3544,8 +3584,8 @@
         </p:nvSpPr>
         <p:spPr>
           <a:xfrm>
-            <a:off x="365760" y="109728"/>
-            <a:ext cx="11457432" cy="365760"/>
+            <a:off x="365760" y="91440"/>
+            <a:ext cx="11457432" cy="329184"/>
           </a:xfrm>
           <a:prstGeom prst="rect">
             <a:avLst/>
@@ -3560,7 +3600,7 @@
           <a:p>
             <a:pPr algn="l"/>
             <a:r>
-              <a:rPr sz="1400" b="1" i="0">
+              <a:rPr sz="1300" b="1" i="0">
                 <a:solidFill>
                   <a:srgbClr val="1A3A5C"/>
                 </a:solidFill>
@@ -3570,9 +3610,49 @@
           </a:p>
         </p:txBody>
       </p:sp>
+      <p:sp>
+        <p:nvSpPr>
+          <p:cNvPr id="3" name="TextBox 2"/>
+          <p:cNvSpPr txBox="1"/>
+          <p:nvPr/>
+        </p:nvSpPr>
+        <p:spPr>
+          <a:xfrm>
+            <a:off x="365760" y="457200"/>
+            <a:ext cx="11457432" cy="1005840"/>
+          </a:xfrm>
+          <a:prstGeom prst="rect">
+            <a:avLst/>
+          </a:prstGeom>
+          <a:solidFill>
+            <a:srgbClr val="FFF5E6"/>
+          </a:solidFill>
+          <a:ln w="15240">
+            <a:solidFill>
+              <a:srgbClr val="B32A2A"/>
+            </a:solidFill>
+          </a:ln>
+        </p:spPr>
+        <p:txBody>
+          <a:bodyPr wrap="square">
+            <a:spAutoFit/>
+          </a:bodyPr>
+          <a:lstStyle/>
+          <a:p>
+            <a:r>
+              <a:rPr sz="1100">
+                <a:solidFill>
+                  <a:srgbClr val="1A3A5C"/>
+                </a:solidFill>
+              </a:rPr>
+              <a:t>El bono soberano de Panamá paga en promedio 1.13 puntos porcentuales más que el bono del Tesoro USA del mismo plazo. la curva soberana panameña está creciente: del 4.68% en plazos cortos sube a 5.75% en los plazos más largos (+1.07 puntos). los forwards implícitos sugieren que las tasas panameñas suban de 4.69% en el primer año a 6.11% en el año 5.</a:t>
+            </a:r>
+          </a:p>
+        </p:txBody>
+      </p:sp>
       <p:pic>
         <p:nvPicPr>
-          <p:cNvPr id="3" name="Picture 2" descr="L_PA_2_soberano.png"/>
+          <p:cNvPr id="4" name="Picture 3" descr="L_PA_2_soberano.png"/>
           <p:cNvPicPr>
             <a:picLocks noChangeAspect="1"/>
           </p:cNvPicPr>
@@ -3586,8 +3666,8 @@
         </p:blipFill>
         <p:spPr>
           <a:xfrm>
-            <a:off x="365760" y="548640"/>
-            <a:ext cx="11457432" cy="7840863"/>
+            <a:off x="365760" y="1554480"/>
+            <a:ext cx="11457432" cy="4892040"/>
           </a:xfrm>
           <a:prstGeom prst="rect">
             <a:avLst/>
@@ -3596,14 +3676,14 @@
       </p:pic>
       <p:sp>
         <p:nvSpPr>
-          <p:cNvPr id="4" name="TextBox 3"/>
+          <p:cNvPr id="5" name="TextBox 4"/>
           <p:cNvSpPr txBox="1"/>
           <p:nvPr/>
         </p:nvSpPr>
         <p:spPr>
           <a:xfrm>
-            <a:off x="365760" y="6537960"/>
-            <a:ext cx="11457432" cy="274320"/>
+            <a:off x="365760" y="6565392"/>
+            <a:ext cx="11457432" cy="256032"/>
           </a:xfrm>
           <a:prstGeom prst="rect">
             <a:avLst/>
@@ -3912,8 +3992,8 @@
         </p:nvSpPr>
         <p:spPr>
           <a:xfrm>
-            <a:off x="365760" y="109728"/>
-            <a:ext cx="11457432" cy="365760"/>
+            <a:off x="365760" y="91440"/>
+            <a:ext cx="11457432" cy="329184"/>
           </a:xfrm>
           <a:prstGeom prst="rect">
             <a:avLst/>
@@ -3928,7 +4008,7 @@
           <a:p>
             <a:pPr algn="l"/>
             <a:r>
-              <a:rPr sz="1400" b="1" i="0">
+              <a:rPr sz="1300" b="1" i="0">
                 <a:solidFill>
                   <a:srgbClr val="1A3A5C"/>
                 </a:solidFill>
@@ -3938,9 +4018,49 @@
           </a:p>
         </p:txBody>
       </p:sp>
+      <p:sp>
+        <p:nvSpPr>
+          <p:cNvPr id="3" name="TextBox 2"/>
+          <p:cNvSpPr txBox="1"/>
+          <p:nvPr/>
+        </p:nvSpPr>
+        <p:spPr>
+          <a:xfrm>
+            <a:off x="365760" y="457200"/>
+            <a:ext cx="11457432" cy="1005840"/>
+          </a:xfrm>
+          <a:prstGeom prst="rect">
+            <a:avLst/>
+          </a:prstGeom>
+          <a:solidFill>
+            <a:srgbClr val="FFF5E6"/>
+          </a:solidFill>
+          <a:ln w="15240">
+            <a:solidFill>
+              <a:srgbClr val="B32A2A"/>
+            </a:solidFill>
+          </a:ln>
+        </p:spPr>
+        <p:txBody>
+          <a:bodyPr wrap="square">
+            <a:spAutoFit/>
+          </a:bodyPr>
+          <a:lstStyle/>
+          <a:p>
+            <a:r>
+              <a:rPr sz="1100">
+                <a:solidFill>
+                  <a:srgbClr val="1A3A5C"/>
+                </a:solidFill>
+              </a:rPr>
+              <a:t>Por qué usamos un modelo combinado en vez de elegir una sola fuente: al juntar lo que dice el mercado de futuros con la regla de la tasa de equilibrio (Taylor), el modelo combinado acierta más. En los últimos 15 años solo 7 de cada 100 meses fue la peor predicción, mientras que el mercado solo lo fue 12 veces y la regla de Taylor sola 82. En la mayoría de los meses (93%) el modelo combinado fue mejor que la peor de las dos fuentes por separado.</a:t>
+            </a:r>
+          </a:p>
+        </p:txBody>
+      </p:sp>
       <p:pic>
         <p:nvPicPr>
-          <p:cNvPr id="3" name="Picture 2" descr="L_USA_0_modelo_combinado.png"/>
+          <p:cNvPr id="4" name="Picture 3" descr="L_USA_0_modelo_combinado.png"/>
           <p:cNvPicPr>
             <a:picLocks noChangeAspect="1"/>
           </p:cNvPicPr>
@@ -3954,8 +4074,8 @@
         </p:blipFill>
         <p:spPr>
           <a:xfrm>
-            <a:off x="365760" y="548640"/>
-            <a:ext cx="11457432" cy="7094403"/>
+            <a:off x="365760" y="1554480"/>
+            <a:ext cx="11457432" cy="4892040"/>
           </a:xfrm>
           <a:prstGeom prst="rect">
             <a:avLst/>
@@ -3964,14 +4084,14 @@
       </p:pic>
       <p:sp>
         <p:nvSpPr>
-          <p:cNvPr id="4" name="TextBox 3"/>
+          <p:cNvPr id="5" name="TextBox 4"/>
           <p:cNvSpPr txBox="1"/>
           <p:nvPr/>
         </p:nvSpPr>
         <p:spPr>
           <a:xfrm>
-            <a:off x="365760" y="6537960"/>
-            <a:ext cx="11457432" cy="274320"/>
+            <a:off x="365760" y="6565392"/>
+            <a:ext cx="11457432" cy="256032"/>
           </a:xfrm>
           <a:prstGeom prst="rect">
             <a:avLst/>
@@ -4022,8 +4142,8 @@
         </p:nvSpPr>
         <p:spPr>
           <a:xfrm>
-            <a:off x="365760" y="109728"/>
-            <a:ext cx="11457432" cy="365760"/>
+            <a:off x="365760" y="91440"/>
+            <a:ext cx="11457432" cy="329184"/>
           </a:xfrm>
           <a:prstGeom prst="rect">
             <a:avLst/>
@@ -4038,7 +4158,7 @@
           <a:p>
             <a:pPr algn="l"/>
             <a:r>
-              <a:rPr sz="1400" b="1" i="0">
+              <a:rPr sz="1300" b="1" i="0">
                 <a:solidFill>
                   <a:srgbClr val="1A3A5C"/>
                 </a:solidFill>
@@ -4048,9 +4168,49 @@
           </a:p>
         </p:txBody>
       </p:sp>
+      <p:sp>
+        <p:nvSpPr>
+          <p:cNvPr id="3" name="TextBox 2"/>
+          <p:cNvSpPr txBox="1"/>
+          <p:nvPr/>
+        </p:nvSpPr>
+        <p:spPr>
+          <a:xfrm>
+            <a:off x="365760" y="457200"/>
+            <a:ext cx="11457432" cy="1005840"/>
+          </a:xfrm>
+          <a:prstGeom prst="rect">
+            <a:avLst/>
+          </a:prstGeom>
+          <a:solidFill>
+            <a:srgbClr val="FFF5E6"/>
+          </a:solidFill>
+          <a:ln w="15240">
+            <a:solidFill>
+              <a:srgbClr val="B32A2A"/>
+            </a:solidFill>
+          </a:ln>
+        </p:spPr>
+        <p:txBody>
+          <a:bodyPr wrap="square">
+            <a:spAutoFit/>
+          </a:bodyPr>
+          <a:lstStyle/>
+          <a:p>
+            <a:r>
+              <a:rPr sz="1100">
+                <a:solidFill>
+                  <a:srgbClr val="1A3A5C"/>
+                </a:solidFill>
+              </a:rPr>
+              <a:t>El mercado espera que la Fed mantenga tasas más altas de lo que ella misma proyecta. Para 2028, los miembros de la Fed proyectan en promedio 3.40%, pero el mercado descuenta 3.87%. Cambios vs proyección anterior de la Fed: para 2026 subió 40 centésimas, para 2027 subió 50 centésimas, para 2028 subió 30 centésimas.</a:t>
+            </a:r>
+          </a:p>
+        </p:txBody>
+      </p:sp>
       <p:pic>
         <p:nvPicPr>
-          <p:cNvPr id="3" name="Picture 2" descr="L_USA_1_dotplot.png"/>
+          <p:cNvPr id="4" name="Picture 3" descr="L_USA_1_dotplot.png"/>
           <p:cNvPicPr>
             <a:picLocks noChangeAspect="1"/>
           </p:cNvPicPr>
@@ -4064,8 +4224,8 @@
         </p:blipFill>
         <p:spPr>
           <a:xfrm>
-            <a:off x="365760" y="548640"/>
-            <a:ext cx="11457432" cy="7090811"/>
+            <a:off x="365760" y="1554480"/>
+            <a:ext cx="11457432" cy="4892040"/>
           </a:xfrm>
           <a:prstGeom prst="rect">
             <a:avLst/>
@@ -4074,14 +4234,14 @@
       </p:pic>
       <p:sp>
         <p:nvSpPr>
-          <p:cNvPr id="4" name="TextBox 3"/>
+          <p:cNvPr id="5" name="TextBox 4"/>
           <p:cNvSpPr txBox="1"/>
           <p:nvPr/>
         </p:nvSpPr>
         <p:spPr>
           <a:xfrm>
-            <a:off x="365760" y="6537960"/>
-            <a:ext cx="11457432" cy="274320"/>
+            <a:off x="365760" y="6565392"/>
+            <a:ext cx="11457432" cy="256032"/>
           </a:xfrm>
           <a:prstGeom prst="rect">
             <a:avLst/>
@@ -4132,8 +4292,8 @@
         </p:nvSpPr>
         <p:spPr>
           <a:xfrm>
-            <a:off x="365760" y="109728"/>
-            <a:ext cx="11457432" cy="365760"/>
+            <a:off x="365760" y="91440"/>
+            <a:ext cx="11457432" cy="329184"/>
           </a:xfrm>
           <a:prstGeom prst="rect">
             <a:avLst/>
@@ -4148,7 +4308,7 @@
           <a:p>
             <a:pPr algn="l"/>
             <a:r>
-              <a:rPr sz="1400" b="1" i="0">
+              <a:rPr sz="1300" b="1" i="0">
                 <a:solidFill>
                   <a:srgbClr val="1A3A5C"/>
                 </a:solidFill>
@@ -4158,9 +4318,49 @@
           </a:p>
         </p:txBody>
       </p:sp>
+      <p:sp>
+        <p:nvSpPr>
+          <p:cNvPr id="3" name="TextBox 2"/>
+          <p:cNvSpPr txBox="1"/>
+          <p:nvPr/>
+        </p:nvSpPr>
+        <p:spPr>
+          <a:xfrm>
+            <a:off x="365760" y="457200"/>
+            <a:ext cx="11457432" cy="1005840"/>
+          </a:xfrm>
+          <a:prstGeom prst="rect">
+            <a:avLst/>
+          </a:prstGeom>
+          <a:solidFill>
+            <a:srgbClr val="FFF5E6"/>
+          </a:solidFill>
+          <a:ln w="15240">
+            <a:solidFill>
+              <a:srgbClr val="B32A2A"/>
+            </a:solidFill>
+          </a:ln>
+        </p:spPr>
+        <p:txBody>
+          <a:bodyPr wrap="square">
+            <a:spAutoFit/>
+          </a:bodyPr>
+          <a:lstStyle/>
+          <a:p>
+            <a:r>
+              <a:rPr sz="1100">
+                <a:solidFill>
+                  <a:srgbClr val="1A3A5C"/>
+                </a:solidFill>
+              </a:rPr>
+              <a:t>Nuestro modelo combinado proyecta que en los próximos 12 meses la Fed va a mantener las tasas prácticamente sin cambios (+14 centésimas de punto desde el nivel actual de 3.62%). El mercado de futuros descuenta +17 centésimas, la regla de Taylor sugiere +11 centésimas. El sentimiento de noticias sobre bonos del Tesoro largo está pesimista sobre los bonos largos.</a:t>
+            </a:r>
+          </a:p>
+        </p:txBody>
+      </p:sp>
       <p:pic>
         <p:nvPicPr>
-          <p:cNvPr id="3" name="Picture 2" descr="L_USA_2_path_fed.png"/>
+          <p:cNvPr id="4" name="Picture 3" descr="L_USA_2_path_fed.png"/>
           <p:cNvPicPr>
             <a:picLocks noChangeAspect="1"/>
           </p:cNvPicPr>
@@ -4174,8 +4374,8 @@
         </p:blipFill>
         <p:spPr>
           <a:xfrm>
-            <a:off x="365760" y="548640"/>
-            <a:ext cx="11457432" cy="6351750"/>
+            <a:off x="365760" y="1554480"/>
+            <a:ext cx="11457432" cy="4892040"/>
           </a:xfrm>
           <a:prstGeom prst="rect">
             <a:avLst/>
@@ -4184,14 +4384,14 @@
       </p:pic>
       <p:sp>
         <p:nvSpPr>
-          <p:cNvPr id="4" name="TextBox 3"/>
+          <p:cNvPr id="5" name="TextBox 4"/>
           <p:cNvSpPr txBox="1"/>
           <p:nvPr/>
         </p:nvSpPr>
         <p:spPr>
           <a:xfrm>
-            <a:off x="365760" y="6537960"/>
-            <a:ext cx="11457432" cy="274320"/>
+            <a:off x="365760" y="6565392"/>
+            <a:ext cx="11457432" cy="256032"/>
           </a:xfrm>
           <a:prstGeom prst="rect">
             <a:avLst/>
@@ -4242,8 +4442,8 @@
         </p:nvSpPr>
         <p:spPr>
           <a:xfrm>
-            <a:off x="365760" y="109728"/>
-            <a:ext cx="11457432" cy="365760"/>
+            <a:off x="365760" y="91440"/>
+            <a:ext cx="11457432" cy="329184"/>
           </a:xfrm>
           <a:prstGeom prst="rect">
             <a:avLst/>
@@ -4258,7 +4458,7 @@
           <a:p>
             <a:pPr algn="l"/>
             <a:r>
-              <a:rPr sz="1400" b="1" i="0">
+              <a:rPr sz="1300" b="1" i="0">
                 <a:solidFill>
                   <a:srgbClr val="1A3A5C"/>
                 </a:solidFill>
@@ -4268,9 +4468,49 @@
           </a:p>
         </p:txBody>
       </p:sp>
+      <p:sp>
+        <p:nvSpPr>
+          <p:cNvPr id="3" name="TextBox 2"/>
+          <p:cNvSpPr txBox="1"/>
+          <p:nvPr/>
+        </p:nvSpPr>
+        <p:spPr>
+          <a:xfrm>
+            <a:off x="365760" y="457200"/>
+            <a:ext cx="11457432" cy="1005840"/>
+          </a:xfrm>
+          <a:prstGeom prst="rect">
+            <a:avLst/>
+          </a:prstGeom>
+          <a:solidFill>
+            <a:srgbClr val="FFF5E6"/>
+          </a:solidFill>
+          <a:ln w="15240">
+            <a:solidFill>
+              <a:srgbClr val="B32A2A"/>
+            </a:solidFill>
+          </a:ln>
+        </p:spPr>
+        <p:txBody>
+          <a:bodyPr wrap="square">
+            <a:spAutoFit/>
+          </a:bodyPr>
+          <a:lstStyle/>
+          <a:p>
+            <a:r>
+              <a:rPr sz="1100">
+                <a:solidFill>
+                  <a:srgbClr val="1A3A5C"/>
+                </a:solidFill>
+              </a:rPr>
+              <a:t>La curva de tasas del Tesoro USA está casi plana: el bono a 10 años paga apenas 0.38 puntos más que el de 2 años (4.43% vs 4.05%). el mercado no anticipa bajadas importantes de tasas en los próximos 5 años (espera que la Fed mantenga el nivel actual). la inflación esperada baja con el plazo: para los próximos 2 años el mercado descuenta 2.64% anual, pero para los próximos 30 años descuenta 2.28% (la Fed lograría su meta).</a:t>
+            </a:r>
+          </a:p>
+        </p:txBody>
+      </p:sp>
       <p:pic>
         <p:nvPicPr>
-          <p:cNvPr id="3" name="Picture 2" descr="L_USA_3_curvas_usa.png"/>
+          <p:cNvPr id="4" name="Picture 3" descr="L_USA_3_curvas_usa.png"/>
           <p:cNvPicPr>
             <a:picLocks noChangeAspect="1"/>
           </p:cNvPicPr>
@@ -4284,8 +4524,8 @@
         </p:blipFill>
         <p:spPr>
           <a:xfrm>
-            <a:off x="365760" y="548640"/>
-            <a:ext cx="11457432" cy="8436284"/>
+            <a:off x="365760" y="1554480"/>
+            <a:ext cx="11457432" cy="4892040"/>
           </a:xfrm>
           <a:prstGeom prst="rect">
             <a:avLst/>
@@ -4294,14 +4534,14 @@
       </p:pic>
       <p:sp>
         <p:nvSpPr>
-          <p:cNvPr id="4" name="TextBox 3"/>
+          <p:cNvPr id="5" name="TextBox 4"/>
           <p:cNvSpPr txBox="1"/>
           <p:nvPr/>
         </p:nvSpPr>
         <p:spPr>
           <a:xfrm>
-            <a:off x="365760" y="6537960"/>
-            <a:ext cx="11457432" cy="274320"/>
+            <a:off x="365760" y="6565392"/>
+            <a:ext cx="11457432" cy="256032"/>
           </a:xfrm>
           <a:prstGeom prst="rect">
             <a:avLst/>
@@ -4481,8 +4721,8 @@
         </p:nvSpPr>
         <p:spPr>
           <a:xfrm>
-            <a:off x="365760" y="109728"/>
-            <a:ext cx="11457432" cy="365760"/>
+            <a:off x="365760" y="91440"/>
+            <a:ext cx="11457432" cy="329184"/>
           </a:xfrm>
           <a:prstGeom prst="rect">
             <a:avLst/>
@@ -4497,7 +4737,7 @@
           <a:p>
             <a:pPr algn="l"/>
             <a:r>
-              <a:rPr sz="1400" b="1" i="0">
+              <a:rPr sz="1300" b="1" i="0">
                 <a:solidFill>
                   <a:srgbClr val="1A3A5C"/>
                 </a:solidFill>
@@ -4507,9 +4747,49 @@
           </a:p>
         </p:txBody>
       </p:sp>
+      <p:sp>
+        <p:nvSpPr>
+          <p:cNvPr id="3" name="TextBox 2"/>
+          <p:cNvSpPr txBox="1"/>
+          <p:nvPr/>
+        </p:nvSpPr>
+        <p:spPr>
+          <a:xfrm>
+            <a:off x="365760" y="457200"/>
+            <a:ext cx="11457432" cy="1005840"/>
+          </a:xfrm>
+          <a:prstGeom prst="rect">
+            <a:avLst/>
+          </a:prstGeom>
+          <a:solidFill>
+            <a:srgbClr val="FFF5E6"/>
+          </a:solidFill>
+          <a:ln w="15240">
+            <a:solidFill>
+              <a:srgbClr val="B32A2A"/>
+            </a:solidFill>
+          </a:ln>
+        </p:spPr>
+        <p:txBody>
+          <a:bodyPr wrap="square">
+            <a:spAutoFit/>
+          </a:bodyPr>
+          <a:lstStyle/>
+          <a:p>
+            <a:r>
+              <a:rPr sz="1100">
+                <a:solidFill>
+                  <a:srgbClr val="1A3A5C"/>
+                </a:solidFill>
+              </a:rPr>
+              <a:t>Niveles extremos vs los últimos 5 años: el dólar vs yen está en niveles muy altos vs los últimos 5 años (más alto que el 99% de las observaciones recientes).</a:t>
+            </a:r>
+          </a:p>
+        </p:txBody>
+      </p:sp>
       <p:pic>
         <p:nvPicPr>
-          <p:cNvPr id="3" name="Picture 2" descr="L_FX_1_g10.png"/>
+          <p:cNvPr id="4" name="Picture 3" descr="L_FX_1_g10.png"/>
           <p:cNvPicPr>
             <a:picLocks noChangeAspect="1"/>
           </p:cNvPicPr>
@@ -4523,8 +4803,8 @@
         </p:blipFill>
         <p:spPr>
           <a:xfrm>
-            <a:off x="365760" y="548640"/>
-            <a:ext cx="11457432" cy="7756086"/>
+            <a:off x="365760" y="1554480"/>
+            <a:ext cx="11457432" cy="4892040"/>
           </a:xfrm>
           <a:prstGeom prst="rect">
             <a:avLst/>
@@ -4533,14 +4813,14 @@
       </p:pic>
       <p:sp>
         <p:nvSpPr>
-          <p:cNvPr id="4" name="TextBox 3"/>
+          <p:cNvPr id="5" name="TextBox 4"/>
           <p:cNvSpPr txBox="1"/>
           <p:nvPr/>
         </p:nvSpPr>
         <p:spPr>
           <a:xfrm>
-            <a:off x="365760" y="6537960"/>
-            <a:ext cx="11457432" cy="274320"/>
+            <a:off x="365760" y="6565392"/>
+            <a:ext cx="11457432" cy="256032"/>
           </a:xfrm>
           <a:prstGeom prst="rect">
             <a:avLst/>

--- a/docs/informativa/outputs/2026-06-17/deck_informativa_2026-06-17.pptx
+++ b/docs/informativa/outputs/2026-06-17/deck_informativa_2026-06-17.pptx
@@ -3495,7 +3495,7 @@
                   <a:srgbClr val="1A3A5C"/>
                 </a:solidFill>
               </a:rPr>
-              <a:t>Un emisor calificado A en Panamá paga aproximadamente 2.70 puntos porcentuales más que uno calificado AAA, sobre el bono del Tesoro USA del mismo plazo. el plazo más caro para emisores A es '3 a 5 años', donde pagan 4.40 puntos sobre el Tesoro USA. el sector Industriales paga 2.93 puntos porcentuales más que Financiero al mismo nivel de calificación.</a:t>
+              <a:t>Un emisor calificado A en PanamÃ¡ paga aproximadamente 2.70 puntos porcentuales mÃ¡s que uno calificado AAA, sobre el bono del Tesoro USA del mismo plazo. el plazo mÃ¡s caro para emisores A es '3 a 5 aÃ±os', donde pagan 4.40 puntos sobre el Tesoro USA. el sector Industriales paga 2.93 puntos porcentuales mÃ¡s que Financiero al mismo nivel de calificaciÃ³n.</a:t>
             </a:r>
           </a:p>
         </p:txBody>
@@ -3645,7 +3645,7 @@
                   <a:srgbClr val="1A3A5C"/>
                 </a:solidFill>
               </a:rPr>
-              <a:t>El bono soberano de Panamá paga en promedio 1.13 puntos porcentuales más que el bono del Tesoro USA del mismo plazo. la curva soberana panameña está creciente: del 4.68% en plazos cortos sube a 5.75% en los plazos más largos (+1.07 puntos). los forwards implícitos sugieren que las tasas panameñas suban de 4.69% en el primer año a 6.11% en el año 5.</a:t>
+              <a:t>El bono soberano de PanamÃ¡ paga en promedio 1.13 puntos porcentuales mÃ¡s que el bono del Tesoro USA del mismo plazo. la curva soberana panameÃ±a estÃ¡ creciente: del 4.68% en plazos cortos sube a 5.75% en los plazos mÃ¡s largos (+1.07 puntos). los forwards implÃ­citos sugieren que las tasas panameÃ±as suban de 4.69% en el primer aÃ±o a 6.11% en el aÃ±o 5.</a:t>
             </a:r>
           </a:p>
         </p:txBody>
@@ -4053,7 +4053,7 @@
                   <a:srgbClr val="1A3A5C"/>
                 </a:solidFill>
               </a:rPr>
-              <a:t>Por qué usamos un modelo combinado en vez de elegir una sola fuente: al juntar lo que dice el mercado de futuros con la regla de la tasa de equilibrio (Taylor), el modelo combinado acierta más. En los últimos 15 años solo 7 de cada 100 meses fue la peor predicción, mientras que el mercado solo lo fue 12 veces y la regla de Taylor sola 82. En la mayoría de los meses (93%) el modelo combinado fue mejor que la peor de las dos fuentes por separado.</a:t>
+              <a:t>Por quÃ© usamos un modelo combinado en vez de elegir una sola fuente: al juntar lo que dice el mercado de futuros con la regla de la tasa de equilibrio (Taylor), el modelo combinado acierta mÃ¡s. En los Ãºltimos 15 aÃ±os solo 7 de cada 100 meses fue la peor predicciÃ³n, mientras que el mercado solo lo fue 12 veces y la regla de Taylor sola 82. En la mayorÃ­a de los meses (93%) el modelo combinado fue mejor que la peor de las dos fuentes por separado.</a:t>
             </a:r>
           </a:p>
         </p:txBody>
@@ -4203,7 +4203,7 @@
                   <a:srgbClr val="1A3A5C"/>
                 </a:solidFill>
               </a:rPr>
-              <a:t>El mercado espera que la Fed mantenga tasas más altas de lo que ella misma proyecta. Para 2028, los miembros de la Fed proyectan en promedio 3.40%, pero el mercado descuenta 3.87%. Cambios vs proyección anterior de la Fed: para 2026 subió 40 centésimas, para 2027 subió 50 centésimas, para 2028 subió 30 centésimas.</a:t>
+              <a:t>El mercado espera que la Fed mantenga tasas mÃ¡s altas de lo que ella misma proyecta. Para 2028, los miembros de la Fed proyectan en promedio 3.40%, pero el mercado descuenta 3.87%. Cambios vs proyecciÃ³n anterior de la Fed: para 2026 subiÃ³ 40 centÃ©simas, para 2027 subiÃ³ 50 centÃ©simas, para 2028 subiÃ³ 30 centÃ©simas.</a:t>
             </a:r>
           </a:p>
         </p:txBody>
@@ -4353,7 +4353,7 @@
                   <a:srgbClr val="1A3A5C"/>
                 </a:solidFill>
               </a:rPr>
-              <a:t>Nuestro modelo combinado proyecta que en los próximos 12 meses la Fed va a mantener las tasas prácticamente sin cambios (+14 centésimas de punto desde el nivel actual de 3.62%). El mercado de futuros descuenta +17 centésimas, la regla de Taylor sugiere +11 centésimas. El sentimiento de noticias sobre bonos del Tesoro largo está pesimista sobre los bonos largos.</a:t>
+              <a:t>Nuestro modelo combinado proyecta que en los prÃ³ximos 12 meses la Fed va a mantener las tasas prÃ¡cticamente sin cambios (+14 centÃ©simas de punto desde el nivel actual de 3.62%). El mercado de futuros descuenta +17 centÃ©simas, la regla de Taylor sugiere +11 centÃ©simas. El sentimiento de noticias sobre bonos del Tesoro largo estÃ¡ pesimista sobre los bonos largos.</a:t>
             </a:r>
           </a:p>
         </p:txBody>
@@ -4503,7 +4503,7 @@
                   <a:srgbClr val="1A3A5C"/>
                 </a:solidFill>
               </a:rPr>
-              <a:t>La curva de tasas del Tesoro USA está casi plana: el bono a 10 años paga apenas 0.38 puntos más que el de 2 años (4.43% vs 4.05%). el mercado no anticipa bajadas importantes de tasas en los próximos 5 años (espera que la Fed mantenga el nivel actual). la inflación esperada baja con el plazo: para los próximos 2 años el mercado descuenta 2.64% anual, pero para los próximos 30 años descuenta 2.28% (la Fed lograría su meta).</a:t>
+              <a:t>La curva de tasas del Tesoro USA estÃ¡ casi plana: el bono a 10 aÃ±os paga apenas 0.38 puntos mÃ¡s que el de 2 aÃ±os (4.43% vs 4.05%). el mercado no anticipa bajadas importantes de tasas en los prÃ³ximos 5 aÃ±os (espera que la Fed mantenga el nivel actual). la inflaciÃ³n esperada baja con el plazo: para los prÃ³ximos 2 aÃ±os el mercado descuenta 2.64% anual, pero para los prÃ³ximos 30 aÃ±os descuenta 2.28% (la Fed lograrÃ­a su meta).</a:t>
             </a:r>
           </a:p>
         </p:txBody>
@@ -4782,7 +4782,7 @@
                   <a:srgbClr val="1A3A5C"/>
                 </a:solidFill>
               </a:rPr>
-              <a:t>Niveles extremos vs los últimos 5 años: el dólar vs yen está en niveles muy altos vs los últimos 5 años (más alto que el 99% de las observaciones recientes).</a:t>
+              <a:t>Niveles extremos vs los Ãºltimos 5 aÃ±os: el dÃ³lar vs yen estÃ¡ en niveles muy altos vs los Ãºltimos 5 aÃ±os (mÃ¡s alto que el 99% de las observaciones recientes).</a:t>
             </a:r>
           </a:p>
         </p:txBody>

--- a/docs/informativa/outputs/2026-06-17/deck_informativa_2026-06-17.pptx
+++ b/docs/informativa/outputs/2026-06-17/deck_informativa_2026-06-17.pptx
@@ -3495,7 +3495,7 @@
                   <a:srgbClr val="1A3A5C"/>
                 </a:solidFill>
               </a:rPr>
-              <a:t>Un emisor calificado A en Panamá paga aproximadamente 2.70 puntos porcentuales más que uno calificado AAA, sobre el bono del Tesoro USA del mismo plazo. el plazo más caro para emisores A es '3 a 5 años', donde pagan 4.40 puntos sobre el Tesoro USA. el sector Industriales paga 2.93 puntos porcentuales más que Financiero al mismo nivel de calificación.</a:t>
+              <a:t>Un emisor calificado A en Panamá paga aproximadamente 2.70 puntos porcentuales más que uno calificado AAA, sobre el bono del Tesoro USA del mismo plazo. el plazo más caro para emisores A es '3 a 5 años', donde pagan 4.40 puntos sobre el Tesoro USA. el sector Industriales paga 2.97 puntos porcentuales más que Financiero al mismo nivel de calificación.</a:t>
             </a:r>
           </a:p>
         </p:txBody>
@@ -3645,7 +3645,7 @@
                   <a:srgbClr val="1A3A5C"/>
                 </a:solidFill>
               </a:rPr>
-              <a:t>El bono soberano de Panamá paga en promedio 1.13 puntos porcentuales más que el bono del Tesoro USA del mismo plazo. la curva soberana panameña está creciente: del 4.68% en plazos cortos sube a 5.75% en los plazos más largos (+1.07 puntos). los forwards implícitos sugieren que las tasas panameñas suban de 4.69% en el primer año a 6.11% en el año 5.</a:t>
+              <a:t>El bono soberano de Panamá paga en promedio 1.00 puntos porcentuales más que el bono del Tesoro USA del mismo plazo. la curva soberana panameña está creciente: del 4.68% en plazos cortos sube a 5.75% en los plazos más largos (+1.07 puntos). los forwards implícitos sugieren que las tasas panameñas suban de 4.69% en el primer año a 6.11% en el año 5.</a:t>
             </a:r>
           </a:p>
         </p:txBody>
@@ -4053,7 +4053,7 @@
                   <a:srgbClr val="1A3A5C"/>
                 </a:solidFill>
               </a:rPr>
-              <a:t>Por qué usamos un modelo combinado en vez de elegir una sola fuente: al juntar lo que dice el mercado de futuros con la regla de la tasa de equilibrio (Taylor), el modelo combinado acierta más. En los últimos 15 años solo 7 de cada 100 meses fue la peor predicción, mientras que el mercado solo lo fue 12 veces y la regla de Taylor sola 82. En la mayoría de los meses (93%) el modelo combinado fue mejor que la peor de las dos fuentes por separado.</a:t>
+              <a:t>Por qué combinamos: el mercado de futuros solo es la predicción más certera en el 66% de los meses, con error típico de 7 centésimas. Pero cuando se equivoca tiende a hacerlo fuerte: es la peor el 12% del tiempo. La regla de Taylor sola es aún más volátil (82% peor). El modelo combinado sacrifica algo de frecuencia de acierto (gana solo el 28%, error típico 11) a cambio de robustez: casi nunca es catastrófico, solo el 7% es la peor. En decisiones de inversión, esta robustez importa más que ganarle al mercado cada mes.</a:t>
             </a:r>
           </a:p>
         </p:txBody>
@@ -4503,7 +4503,7 @@
                   <a:srgbClr val="1A3A5C"/>
                 </a:solidFill>
               </a:rPr>
-              <a:t>La curva de tasas del Tesoro USA está casi plana: el bono a 10 años paga apenas 0.38 puntos más que el de 2 años (4.43% vs 4.05%). el mercado no anticipa bajadas importantes de tasas en los próximos 5 años (espera que la Fed mantenga el nivel actual). la inflación esperada baja con el plazo: para los próximos 2 años el mercado descuenta 2.64% anual, pero para los próximos 30 años descuenta 2.28% (la Fed lograría su meta).</a:t>
+              <a:t>La curva de tasas del Tesoro USA está casi plana: el bono a 10 años paga apenas 0.29 puntos más que el de 2 años (4.49% vs 4.20%). el mercado no anticipa bajadas importantes de tasas en los próximos 5 años (espera que la Fed mantenga el nivel actual). la inflación esperada baja con el plazo: para los próximos 2 años el mercado descuenta 2.64% anual, pero para los próximos 30 años descuenta 2.28% (la Fed lograría su meta).</a:t>
             </a:r>
           </a:p>
         </p:txBody>
